--- a/MyOwnPresentations/pptx/Hash_Tables_VII.pptx
+++ b/MyOwnPresentations/pptx/Hash_Tables_VII.pptx
@@ -3264,7 +3264,7 @@
           <a:p>
             <a:fld id="{32946ECA-30FB-4F03-931F-B6980449CAEA}" type="datetimeFigureOut">
               <a:rPr lang="en-US" smtClean="0"/>
-              <a:t>9/6/2025</a:t>
+              <a:t>3/12/2026</a:t>
             </a:fld>
             <a:endParaRPr lang="en-US"/>
           </a:p>
@@ -3462,7 +3462,7 @@
           <a:p>
             <a:fld id="{32946ECA-30FB-4F03-931F-B6980449CAEA}" type="datetimeFigureOut">
               <a:rPr lang="en-US" smtClean="0"/>
-              <a:t>9/6/2025</a:t>
+              <a:t>3/12/2026</a:t>
             </a:fld>
             <a:endParaRPr lang="en-US"/>
           </a:p>
@@ -3670,7 +3670,7 @@
           <a:p>
             <a:fld id="{32946ECA-30FB-4F03-931F-B6980449CAEA}" type="datetimeFigureOut">
               <a:rPr lang="en-US" smtClean="0"/>
-              <a:t>9/6/2025</a:t>
+              <a:t>3/12/2026</a:t>
             </a:fld>
             <a:endParaRPr lang="en-US"/>
           </a:p>
@@ -3890,7 +3890,7 @@
           <a:p>
             <a:fld id="{5C041930-F8FC-4542-827E-E504F4750562}" type="datetimeFigureOut">
               <a:rPr lang="en-US" smtClean="0"/>
-              <a:t>9/6/2025</a:t>
+              <a:t>3/12/2026</a:t>
             </a:fld>
             <a:endParaRPr lang="en-US"/>
           </a:p>
@@ -4088,7 +4088,7 @@
           <a:p>
             <a:fld id="{5C041930-F8FC-4542-827E-E504F4750562}" type="datetimeFigureOut">
               <a:rPr lang="en-US" smtClean="0"/>
-              <a:t>9/6/2025</a:t>
+              <a:t>3/12/2026</a:t>
             </a:fld>
             <a:endParaRPr lang="en-US"/>
           </a:p>
@@ -4363,7 +4363,7 @@
           <a:p>
             <a:fld id="{5C041930-F8FC-4542-827E-E504F4750562}" type="datetimeFigureOut">
               <a:rPr lang="en-US" smtClean="0"/>
-              <a:t>9/6/2025</a:t>
+              <a:t>3/12/2026</a:t>
             </a:fld>
             <a:endParaRPr lang="en-US"/>
           </a:p>
@@ -4628,7 +4628,7 @@
           <a:p>
             <a:fld id="{5C041930-F8FC-4542-827E-E504F4750562}" type="datetimeFigureOut">
               <a:rPr lang="en-US" smtClean="0"/>
-              <a:t>9/6/2025</a:t>
+              <a:t>3/12/2026</a:t>
             </a:fld>
             <a:endParaRPr lang="en-US"/>
           </a:p>
@@ -5040,7 +5040,7 @@
           <a:p>
             <a:fld id="{5C041930-F8FC-4542-827E-E504F4750562}" type="datetimeFigureOut">
               <a:rPr lang="en-US" smtClean="0"/>
-              <a:t>9/6/2025</a:t>
+              <a:t>3/12/2026</a:t>
             </a:fld>
             <a:endParaRPr lang="en-US"/>
           </a:p>
@@ -5181,7 +5181,7 @@
           <a:p>
             <a:fld id="{5C041930-F8FC-4542-827E-E504F4750562}" type="datetimeFigureOut">
               <a:rPr lang="en-US" smtClean="0"/>
-              <a:t>9/6/2025</a:t>
+              <a:t>3/12/2026</a:t>
             </a:fld>
             <a:endParaRPr lang="en-US"/>
           </a:p>
@@ -5294,7 +5294,7 @@
           <a:p>
             <a:fld id="{5C041930-F8FC-4542-827E-E504F4750562}" type="datetimeFigureOut">
               <a:rPr lang="en-US" smtClean="0"/>
-              <a:t>9/6/2025</a:t>
+              <a:t>3/12/2026</a:t>
             </a:fld>
             <a:endParaRPr lang="en-US"/>
           </a:p>
@@ -5605,7 +5605,7 @@
           <a:p>
             <a:fld id="{5C041930-F8FC-4542-827E-E504F4750562}" type="datetimeFigureOut">
               <a:rPr lang="en-US" smtClean="0"/>
-              <a:t>9/6/2025</a:t>
+              <a:t>3/12/2026</a:t>
             </a:fld>
             <a:endParaRPr lang="en-US"/>
           </a:p>
@@ -5803,7 +5803,7 @@
           <a:p>
             <a:fld id="{32946ECA-30FB-4F03-931F-B6980449CAEA}" type="datetimeFigureOut">
               <a:rPr lang="en-US" smtClean="0"/>
-              <a:t>9/6/2025</a:t>
+              <a:t>3/12/2026</a:t>
             </a:fld>
             <a:endParaRPr lang="en-US"/>
           </a:p>
@@ -6091,7 +6091,7 @@
           <a:p>
             <a:fld id="{5C041930-F8FC-4542-827E-E504F4750562}" type="datetimeFigureOut">
               <a:rPr lang="en-US" smtClean="0"/>
-              <a:t>9/6/2025</a:t>
+              <a:t>3/12/2026</a:t>
             </a:fld>
             <a:endParaRPr lang="en-US"/>
           </a:p>
@@ -6289,7 +6289,7 @@
           <a:p>
             <a:fld id="{5C041930-F8FC-4542-827E-E504F4750562}" type="datetimeFigureOut">
               <a:rPr lang="en-US" smtClean="0"/>
-              <a:t>9/6/2025</a:t>
+              <a:t>3/12/2026</a:t>
             </a:fld>
             <a:endParaRPr lang="en-US"/>
           </a:p>
@@ -6497,7 +6497,7 @@
           <a:p>
             <a:fld id="{5C041930-F8FC-4542-827E-E504F4750562}" type="datetimeFigureOut">
               <a:rPr lang="en-US" smtClean="0"/>
-              <a:t>9/6/2025</a:t>
+              <a:t>3/12/2026</a:t>
             </a:fld>
             <a:endParaRPr lang="en-US"/>
           </a:p>
@@ -6772,7 +6772,7 @@
           <a:p>
             <a:fld id="{32946ECA-30FB-4F03-931F-B6980449CAEA}" type="datetimeFigureOut">
               <a:rPr lang="en-US" smtClean="0"/>
-              <a:t>9/6/2025</a:t>
+              <a:t>3/12/2026</a:t>
             </a:fld>
             <a:endParaRPr lang="en-US"/>
           </a:p>
@@ -7037,7 +7037,7 @@
           <a:p>
             <a:fld id="{32946ECA-30FB-4F03-931F-B6980449CAEA}" type="datetimeFigureOut">
               <a:rPr lang="en-US" smtClean="0"/>
-              <a:t>9/6/2025</a:t>
+              <a:t>3/12/2026</a:t>
             </a:fld>
             <a:endParaRPr lang="en-US"/>
           </a:p>
@@ -7449,7 +7449,7 @@
           <a:p>
             <a:fld id="{32946ECA-30FB-4F03-931F-B6980449CAEA}" type="datetimeFigureOut">
               <a:rPr lang="en-US" smtClean="0"/>
-              <a:t>9/6/2025</a:t>
+              <a:t>3/12/2026</a:t>
             </a:fld>
             <a:endParaRPr lang="en-US"/>
           </a:p>
@@ -7590,7 +7590,7 @@
           <a:p>
             <a:fld id="{32946ECA-30FB-4F03-931F-B6980449CAEA}" type="datetimeFigureOut">
               <a:rPr lang="en-US" smtClean="0"/>
-              <a:t>9/6/2025</a:t>
+              <a:t>3/12/2026</a:t>
             </a:fld>
             <a:endParaRPr lang="en-US"/>
           </a:p>
@@ -7703,7 +7703,7 @@
           <a:p>
             <a:fld id="{32946ECA-30FB-4F03-931F-B6980449CAEA}" type="datetimeFigureOut">
               <a:rPr lang="en-US" smtClean="0"/>
-              <a:t>9/6/2025</a:t>
+              <a:t>3/12/2026</a:t>
             </a:fld>
             <a:endParaRPr lang="en-US"/>
           </a:p>
@@ -8014,7 +8014,7 @@
           <a:p>
             <a:fld id="{32946ECA-30FB-4F03-931F-B6980449CAEA}" type="datetimeFigureOut">
               <a:rPr lang="en-US" smtClean="0"/>
-              <a:t>9/6/2025</a:t>
+              <a:t>3/12/2026</a:t>
             </a:fld>
             <a:endParaRPr lang="en-US"/>
           </a:p>
@@ -8302,7 +8302,7 @@
           <a:p>
             <a:fld id="{32946ECA-30FB-4F03-931F-B6980449CAEA}" type="datetimeFigureOut">
               <a:rPr lang="en-US" smtClean="0"/>
-              <a:t>9/6/2025</a:t>
+              <a:t>3/12/2026</a:t>
             </a:fld>
             <a:endParaRPr lang="en-US"/>
           </a:p>
@@ -8543,7 +8543,7 @@
           <a:p>
             <a:fld id="{32946ECA-30FB-4F03-931F-B6980449CAEA}" type="datetimeFigureOut">
               <a:rPr lang="en-US" smtClean="0"/>
-              <a:t>9/6/2025</a:t>
+              <a:t>3/12/2026</a:t>
             </a:fld>
             <a:endParaRPr lang="en-US"/>
           </a:p>
@@ -9111,7 +9111,7 @@
           <a:p>
             <a:fld id="{5C041930-F8FC-4542-827E-E504F4750562}" type="datetimeFigureOut">
               <a:rPr lang="en-US" smtClean="0"/>
-              <a:t>9/6/2025</a:t>
+              <a:t>3/12/2026</a:t>
             </a:fld>
             <a:endParaRPr lang="en-US"/>
           </a:p>
@@ -10051,7 +10051,23 @@
                   <a:srgbClr val="FFFFFF"/>
                 </a:solidFill>
               </a:rPr>
-              <a:t>2025/26. Autumn Semester</a:t>
+              <a:t>2025/26. </a:t>
+            </a:r>
+            <a:r>
+              <a:rPr lang="hu-HU" dirty="0">
+                <a:solidFill>
+                  <a:srgbClr val="FFFFFF"/>
+                </a:solidFill>
+              </a:rPr>
+              <a:t>Spring</a:t>
+            </a:r>
+            <a:r>
+              <a:rPr lang="en-US" dirty="0">
+                <a:solidFill>
+                  <a:srgbClr val="FFFFFF"/>
+                </a:solidFill>
+              </a:rPr>
+              <a:t> Semester</a:t>
             </a:r>
           </a:p>
           <a:p>
@@ -12018,8 +12034,8 @@
           </a:p>
         </p:txBody>
       </p:sp>
-      <mc:AlternateContent xmlns:mc="http://schemas.openxmlformats.org/markup-compatibility/2006">
-        <mc:Choice xmlns:a14="http://schemas.microsoft.com/office/drawing/2010/main" Requires="a14">
+      <mc:AlternateContent xmlns:mc="http://schemas.openxmlformats.org/markup-compatibility/2006" xmlns:a14="http://schemas.microsoft.com/office/drawing/2010/main">
+        <mc:Choice Requires="a14">
           <p:sp>
             <p:nvSpPr>
               <p:cNvPr id="3" name="Content Placeholder 2">
@@ -12112,7 +12128,7 @@
             </p:txBody>
           </p:sp>
         </mc:Choice>
-        <mc:Fallback>
+        <mc:Fallback xmlns="">
           <p:sp>
             <p:nvSpPr>
               <p:cNvPr id="3" name="Content Placeholder 2">
@@ -12421,8 +12437,8 @@
           </a:p>
         </p:txBody>
       </p:sp>
-      <mc:AlternateContent xmlns:mc="http://schemas.openxmlformats.org/markup-compatibility/2006">
-        <mc:Choice xmlns:a14="http://schemas.microsoft.com/office/drawing/2010/main" Requires="a14">
+      <mc:AlternateContent xmlns:mc="http://schemas.openxmlformats.org/markup-compatibility/2006" xmlns:a14="http://schemas.microsoft.com/office/drawing/2010/main">
+        <mc:Choice Requires="a14">
           <p:sp>
             <p:nvSpPr>
               <p:cNvPr id="3" name="TextBox 2">
@@ -12451,6 +12467,7 @@
               </a:bodyPr>
               <a:lstStyle/>
               <a:p>
+                <a:pPr/>
                 <a14:m>
                   <m:oMathPara xmlns:m="http://schemas.openxmlformats.org/officeDocument/2006/math">
                     <m:oMathParaPr>
@@ -12547,7 +12564,7 @@
             </p:txBody>
           </p:sp>
         </mc:Choice>
-        <mc:Fallback>
+        <mc:Fallback xmlns="">
           <p:sp>
             <p:nvSpPr>
               <p:cNvPr id="3" name="TextBox 2">
@@ -13151,8 +13168,8 @@
           </a:p>
         </p:txBody>
       </p:sp>
-      <mc:AlternateContent xmlns:mc="http://schemas.openxmlformats.org/markup-compatibility/2006">
-        <mc:Choice xmlns:a14="http://schemas.microsoft.com/office/drawing/2010/main" Requires="a14">
+      <mc:AlternateContent xmlns:mc="http://schemas.openxmlformats.org/markup-compatibility/2006" xmlns:a14="http://schemas.microsoft.com/office/drawing/2010/main">
+        <mc:Choice Requires="a14">
           <p:sp>
             <p:nvSpPr>
               <p:cNvPr id="3" name="TextBox 2">
@@ -13278,7 +13295,7 @@
             </p:txBody>
           </p:sp>
         </mc:Choice>
-        <mc:Fallback>
+        <mc:Fallback xmlns="">
           <p:sp>
             <p:nvSpPr>
               <p:cNvPr id="3" name="TextBox 2">
@@ -13323,8 +13340,8 @@
           </p:sp>
         </mc:Fallback>
       </mc:AlternateContent>
-      <mc:AlternateContent xmlns:mc="http://schemas.openxmlformats.org/markup-compatibility/2006">
-        <mc:Choice xmlns:a14="http://schemas.microsoft.com/office/drawing/2010/main" Requires="a14">
+      <mc:AlternateContent xmlns:mc="http://schemas.openxmlformats.org/markup-compatibility/2006" xmlns:a14="http://schemas.microsoft.com/office/drawing/2010/main">
+        <mc:Choice Requires="a14">
           <p:sp>
             <p:nvSpPr>
               <p:cNvPr id="4" name="TextBox 3">
@@ -13353,6 +13370,7 @@
               </a:bodyPr>
               <a:lstStyle/>
               <a:p>
+                <a:pPr/>
                 <a14:m>
                   <m:oMathPara xmlns:m="http://schemas.openxmlformats.org/officeDocument/2006/math">
                     <m:oMathParaPr>
@@ -13379,7 +13397,7 @@
             </p:txBody>
           </p:sp>
         </mc:Choice>
-        <mc:Fallback>
+        <mc:Fallback xmlns="">
           <p:sp>
             <p:nvSpPr>
               <p:cNvPr id="4" name="TextBox 3">
@@ -13424,8 +13442,8 @@
           </p:sp>
         </mc:Fallback>
       </mc:AlternateContent>
-      <mc:AlternateContent xmlns:mc="http://schemas.openxmlformats.org/markup-compatibility/2006">
-        <mc:Choice xmlns:a14="http://schemas.microsoft.com/office/drawing/2010/main" Requires="a14">
+      <mc:AlternateContent xmlns:mc="http://schemas.openxmlformats.org/markup-compatibility/2006" xmlns:a14="http://schemas.microsoft.com/office/drawing/2010/main">
+        <mc:Choice Requires="a14">
           <p:sp>
             <p:nvSpPr>
               <p:cNvPr id="5" name="TextBox 4">
@@ -13454,6 +13472,7 @@
               </a:bodyPr>
               <a:lstStyle/>
               <a:p>
+                <a:pPr/>
                 <a14:m>
                   <m:oMathPara xmlns:m="http://schemas.openxmlformats.org/officeDocument/2006/math">
                     <m:oMathParaPr>
@@ -13504,7 +13523,7 @@
             </p:txBody>
           </p:sp>
         </mc:Choice>
-        <mc:Fallback>
+        <mc:Fallback xmlns="">
           <p:sp>
             <p:nvSpPr>
               <p:cNvPr id="5" name="TextBox 4">
@@ -17246,8 +17265,8 @@
           </a:p>
         </p:txBody>
       </p:sp>
-      <mc:AlternateContent xmlns:mc="http://schemas.openxmlformats.org/markup-compatibility/2006">
-        <mc:Choice xmlns:a14="http://schemas.microsoft.com/office/drawing/2010/main" Requires="a14">
+      <mc:AlternateContent xmlns:mc="http://schemas.openxmlformats.org/markup-compatibility/2006" xmlns:a14="http://schemas.microsoft.com/office/drawing/2010/main">
+        <mc:Choice Requires="a14">
           <p:sp>
             <p:nvSpPr>
               <p:cNvPr id="3" name="Content Placeholder 2">
@@ -17437,12 +17456,14 @@
                 </a:endParaRPr>
               </a:p>
               <a:p>
-                <a14:m/>
+                <a:endParaRPr lang="en-US" i="1" dirty="0">
+                  <a:latin typeface="Cambria Math" panose="02040503050406030204" pitchFamily="18" charset="0"/>
+                </a:endParaRPr>
               </a:p>
             </p:txBody>
           </p:sp>
         </mc:Choice>
-        <mc:Fallback>
+        <mc:Fallback xmlns="">
           <p:sp>
             <p:nvSpPr>
               <p:cNvPr id="3" name="Content Placeholder 2">
@@ -17788,8 +17809,8 @@
           </a:p>
         </p:txBody>
       </p:sp>
-      <mc:AlternateContent xmlns:mc="http://schemas.openxmlformats.org/markup-compatibility/2006">
-        <mc:Choice xmlns:a14="http://schemas.microsoft.com/office/drawing/2010/main" Requires="a14">
+      <mc:AlternateContent xmlns:mc="http://schemas.openxmlformats.org/markup-compatibility/2006" xmlns:a14="http://schemas.microsoft.com/office/drawing/2010/main">
+        <mc:Choice Requires="a14">
           <p:sp>
             <p:nvSpPr>
               <p:cNvPr id="3" name="Content Placeholder 2">
@@ -18086,7 +18107,7 @@
             </p:txBody>
           </p:sp>
         </mc:Choice>
-        <mc:Fallback>
+        <mc:Fallback xmlns="">
           <p:sp>
             <p:nvSpPr>
               <p:cNvPr id="3" name="Content Placeholder 2">
